--- a/LectureSlides/MessyTimeSeries.pptx
+++ b/LectureSlides/MessyTimeSeries.pptx
@@ -4797,7 +4797,7 @@
               <a:rPr lang="en-US" dirty="0">
                 <a:latin typeface="+mn-lt"/>
               </a:rPr>
-              <a:t>Spectral Properties of Images</a:t>
+              <a:t>Spectral Properties of Time Series</a:t>
             </a:r>
           </a:p>
         </p:txBody>
@@ -4865,7 +4865,7 @@
                 <a:ea typeface="Segoe UI" panose="020B0502040204020203" pitchFamily="34" charset="0"/>
                 <a:cs typeface="Segoe UI" panose="020B0502040204020203" pitchFamily="34" charset="0"/>
               </a:rPr>
-              <a:t>Power spectrum reveals the vertical and horizontal frequency components of the image</a:t>
+              <a:t>Power spectrum reveals frequency components of a time series</a:t>
             </a:r>
           </a:p>
           <a:p>
@@ -4881,7 +4881,7 @@
                 <a:ea typeface="Segoe UI" panose="020B0502040204020203" pitchFamily="34" charset="0"/>
                 <a:cs typeface="Segoe UI" panose="020B0502040204020203" pitchFamily="34" charset="0"/>
               </a:rPr>
-              <a:t>components of an image represent regions with slowly changing properties  </a:t>
+              <a:t>components represent regions with slowly changing properties  </a:t>
             </a:r>
           </a:p>
           <a:p>
@@ -4897,7 +4897,7 @@
                 <a:ea typeface="Segoe UI" panose="020B0502040204020203" pitchFamily="34" charset="0"/>
                 <a:cs typeface="Segoe UI" panose="020B0502040204020203" pitchFamily="34" charset="0"/>
               </a:rPr>
-              <a:t>components of an image arise from </a:t>
+              <a:t>components arise from </a:t>
             </a:r>
             <a:r>
               <a:rPr lang="en-US" b="1" dirty="0">
@@ -4915,36 +4915,6 @@
             </a:r>
           </a:p>
           <a:p>
-            <a:pPr lvl="1"/>
-            <a:r>
-              <a:rPr lang="en-US" dirty="0">
-                <a:ea typeface="Segoe UI" panose="020B0502040204020203" pitchFamily="34" charset="0"/>
-                <a:cs typeface="Segoe UI" panose="020B0502040204020203" pitchFamily="34" charset="0"/>
-              </a:rPr>
-              <a:t>Edges   </a:t>
-            </a:r>
-          </a:p>
-          <a:p>
-            <a:pPr lvl="1"/>
-            <a:r>
-              <a:rPr lang="en-US" dirty="0">
-                <a:ea typeface="Segoe UI" panose="020B0502040204020203" pitchFamily="34" charset="0"/>
-                <a:cs typeface="Segoe UI" panose="020B0502040204020203" pitchFamily="34" charset="0"/>
-              </a:rPr>
-              <a:t>Corners</a:t>
-            </a:r>
-          </a:p>
-          <a:p>
-            <a:pPr lvl="1"/>
-            <a:r>
-              <a:rPr lang="en-US" dirty="0">
-                <a:ea typeface="Segoe UI" panose="020B0502040204020203" pitchFamily="34" charset="0"/>
-                <a:cs typeface="Segoe UI" panose="020B0502040204020203" pitchFamily="34" charset="0"/>
-              </a:rPr>
-              <a:t>Texture </a:t>
-            </a:r>
-          </a:p>
-          <a:p>
             <a:r>
               <a:rPr lang="en-US" b="1" dirty="0">
                 <a:ea typeface="Segoe UI" panose="020B0502040204020203" pitchFamily="34" charset="0"/>
@@ -4957,7 +4927,7 @@
                 <a:ea typeface="Segoe UI" panose="020B0502040204020203" pitchFamily="34" charset="0"/>
                 <a:cs typeface="Segoe UI" panose="020B0502040204020203" pitchFamily="34" charset="0"/>
               </a:rPr>
-              <a:t> changes the power spectrum of an image</a:t>
+              <a:t> changes the power spectrum of a time series</a:t>
             </a:r>
             <a:endParaRPr lang="en-GB" b="1" dirty="0">
               <a:ea typeface="Segoe UI" panose="020B0502040204020203" pitchFamily="34" charset="0"/>
@@ -5160,153 +5130,6 @@
                                           <p:spTgt spid="145">
                                             <p:txEl>
                                               <p:pRg st="4" end="4"/>
-                                            </p:txEl>
-                                          </p:spTgt>
-                                        </p:tgtEl>
-                                        <p:attrNameLst>
-                                          <p:attrName>style.visibility</p:attrName>
-                                        </p:attrNameLst>
-                                      </p:cBhvr>
-                                      <p:to>
-                                        <p:strVal val="visible"/>
-                                      </p:to>
-                                    </p:set>
-                                  </p:childTnLst>
-                                </p:cTn>
-                              </p:par>
-                            </p:childTnLst>
-                          </p:cTn>
-                        </p:par>
-                      </p:childTnLst>
-                    </p:cTn>
-                  </p:par>
-                  <p:par>
-                    <p:cTn id="19" fill="hold">
-                      <p:stCondLst>
-                        <p:cond delay="indefinite"/>
-                      </p:stCondLst>
-                      <p:childTnLst>
-                        <p:par>
-                          <p:cTn id="20" fill="hold">
-                            <p:stCondLst>
-                              <p:cond delay="0"/>
-                            </p:stCondLst>
-                            <p:childTnLst>
-                              <p:par>
-                                <p:cTn id="21" presetID="1" presetClass="entr" presetSubtype="0" fill="hold" nodeType="clickEffect">
-                                  <p:stCondLst>
-                                    <p:cond delay="0"/>
-                                  </p:stCondLst>
-                                  <p:childTnLst>
-                                    <p:set>
-                                      <p:cBhvr>
-                                        <p:cTn id="22" dur="1" fill="hold">
-                                          <p:stCondLst>
-                                            <p:cond delay="0"/>
-                                          </p:stCondLst>
-                                        </p:cTn>
-                                        <p:tgtEl>
-                                          <p:spTgt spid="145">
-                                            <p:txEl>
-                                              <p:pRg st="5" end="5"/>
-                                            </p:txEl>
-                                          </p:spTgt>
-                                        </p:tgtEl>
-                                        <p:attrNameLst>
-                                          <p:attrName>style.visibility</p:attrName>
-                                        </p:attrNameLst>
-                                      </p:cBhvr>
-                                      <p:to>
-                                        <p:strVal val="visible"/>
-                                      </p:to>
-                                    </p:set>
-                                  </p:childTnLst>
-                                </p:cTn>
-                              </p:par>
-                            </p:childTnLst>
-                          </p:cTn>
-                        </p:par>
-                      </p:childTnLst>
-                    </p:cTn>
-                  </p:par>
-                  <p:par>
-                    <p:cTn id="23" fill="hold">
-                      <p:stCondLst>
-                        <p:cond delay="indefinite"/>
-                      </p:stCondLst>
-                      <p:childTnLst>
-                        <p:par>
-                          <p:cTn id="24" fill="hold">
-                            <p:stCondLst>
-                              <p:cond delay="0"/>
-                            </p:stCondLst>
-                            <p:childTnLst>
-                              <p:par>
-                                <p:cTn id="25" presetID="1" presetClass="entr" presetSubtype="0" fill="hold" nodeType="clickEffect">
-                                  <p:stCondLst>
-                                    <p:cond delay="0"/>
-                                  </p:stCondLst>
-                                  <p:childTnLst>
-                                    <p:set>
-                                      <p:cBhvr>
-                                        <p:cTn id="26" dur="1" fill="hold">
-                                          <p:stCondLst>
-                                            <p:cond delay="0"/>
-                                          </p:stCondLst>
-                                        </p:cTn>
-                                        <p:tgtEl>
-                                          <p:spTgt spid="145">
-                                            <p:txEl>
-                                              <p:pRg st="6" end="6"/>
-                                            </p:txEl>
-                                          </p:spTgt>
-                                        </p:tgtEl>
-                                        <p:attrNameLst>
-                                          <p:attrName>style.visibility</p:attrName>
-                                        </p:attrNameLst>
-                                      </p:cBhvr>
-                                      <p:to>
-                                        <p:strVal val="visible"/>
-                                      </p:to>
-                                    </p:set>
-                                  </p:childTnLst>
-                                </p:cTn>
-                              </p:par>
-                            </p:childTnLst>
-                          </p:cTn>
-                        </p:par>
-                      </p:childTnLst>
-                    </p:cTn>
-                  </p:par>
-                  <p:par>
-                    <p:cTn id="27" fill="hold">
-                      <p:stCondLst>
-                        <p:cond delay="indefinite"/>
-                      </p:stCondLst>
-                      <p:childTnLst>
-                        <p:par>
-                          <p:cTn id="28" fill="hold">
-                            <p:stCondLst>
-                              <p:cond delay="0"/>
-                            </p:stCondLst>
-                            <p:childTnLst>
-                              <p:par>
-                                <p:cTn id="29" presetID="1" presetClass="entr" presetSubtype="0" fill="hold" nodeType="clickEffect">
-                                  <p:stCondLst>
-                                    <p:cond delay="0"/>
-                                  </p:stCondLst>
-                                  <p:childTnLst>
-                                    <p:set>
-                                      <p:cBhvr>
-                                        <p:cTn id="30" dur="1" fill="hold">
-                                          <p:stCondLst>
-                                            <p:cond delay="0"/>
-                                          </p:stCondLst>
-                                        </p:cTn>
-                                        <p:tgtEl>
-                                          <p:spTgt spid="145">
-                                            <p:txEl>
-                                              <p:pRg st="7" end="7"/>
                                             </p:txEl>
                                           </p:spTgt>
                                         </p:tgtEl>
@@ -7543,8 +7366,8 @@
           </a:p>
         </p:txBody>
       </p:sp>
-      <mc:AlternateContent xmlns:mc="http://schemas.openxmlformats.org/markup-compatibility/2006" xmlns:a14="http://schemas.microsoft.com/office/drawing/2010/main">
-        <mc:Choice Requires="a14">
+      <mc:AlternateContent xmlns:mc="http://schemas.openxmlformats.org/markup-compatibility/2006">
+        <mc:Choice xmlns:a14="http://schemas.microsoft.com/office/drawing/2010/main" Requires="a14">
           <p:sp>
             <p:nvSpPr>
               <p:cNvPr id="145" name="Content Placeholder 6">
@@ -7759,14 +7582,7 @@
                                   <a:latin typeface="Cambria Math" panose="02040503050406030204" pitchFamily="18" charset="0"/>
                                   <a:cs typeface="Segoe UI" panose="020B0502040204020203" pitchFamily="34" charset="0"/>
                                 </a:rPr>
-                                <m:t>−</m:t>
-                              </m:r>
-                              <m:r>
-                                <a:rPr lang="en-US" b="0" i="1" smtClean="0">
-                                  <a:latin typeface="Cambria Math" panose="02040503050406030204" pitchFamily="18" charset="0"/>
-                                  <a:cs typeface="Segoe UI" panose="020B0502040204020203" pitchFamily="34" charset="0"/>
-                                </a:rPr>
-                                <m:t>2</m:t>
+                                <m:t>−2</m:t>
                               </m:r>
                               <m:r>
                                 <a:rPr lang="en-US" b="0" i="1" smtClean="0">
@@ -8301,7 +8117,7 @@
                     <a:ea typeface="Segoe UI" panose="020B0502040204020203" pitchFamily="34" charset="0"/>
                     <a:cs typeface="Segoe UI" panose="020B0502040204020203" pitchFamily="34" charset="0"/>
                   </a:rPr>
-                  <a:t>Real cosine and complex (phase) sine components</a:t>
+                  <a:t>Real cosine and imaginary (phase) sine components</a:t>
                 </a:r>
                 <a:endParaRPr lang="en-GB" dirty="0">
                   <a:ea typeface="Segoe UI" panose="020B0502040204020203" pitchFamily="34" charset="0"/>
@@ -8320,7 +8136,7 @@
             </p:txBody>
           </p:sp>
         </mc:Choice>
-        <mc:Fallback xmlns="">
+        <mc:Fallback>
           <p:sp>
             <p:nvSpPr>
               <p:cNvPr id="145" name="Content Placeholder 6">
@@ -9124,14 +8940,7 @@
                                   <a:latin typeface="Cambria Math" panose="02040503050406030204" pitchFamily="18" charset="0"/>
                                   <a:cs typeface="Segoe UI" panose="020B0502040204020203" pitchFamily="34" charset="0"/>
                                 </a:rPr>
-                                <m:t>−</m:t>
-                              </m:r>
-                              <m:r>
-                                <a:rPr lang="en-US" b="0" i="1" smtClean="0">
-                                  <a:latin typeface="Cambria Math" panose="02040503050406030204" pitchFamily="18" charset="0"/>
-                                  <a:cs typeface="Segoe UI" panose="020B0502040204020203" pitchFamily="34" charset="0"/>
-                                </a:rPr>
-                                <m:t>2</m:t>
+                                <m:t>−2</m:t>
                               </m:r>
                               <m:r>
                                 <a:rPr lang="en-US" b="0" i="1" smtClean="0">
@@ -9700,7 +9509,7 @@
                 <a:ea typeface="Segoe UI" panose="020B0502040204020203" pitchFamily="34" charset="0"/>
                 <a:cs typeface="Segoe UI" panose="020B0502040204020203" pitchFamily="34" charset="0"/>
               </a:rPr>
-              <a:t>Example of single frequency signals and their </a:t>
+              <a:t>Example of single frequency time series and their </a:t>
             </a:r>
             <a:r>
               <a:rPr lang="en-US" b="1" dirty="0">
@@ -9940,7 +9749,7 @@
                 <a:ea typeface="Segoe UI" panose="020B0502040204020203" pitchFamily="34" charset="0"/>
                 <a:cs typeface="Segoe UI" panose="020B0502040204020203" pitchFamily="34" charset="0"/>
               </a:rPr>
-              <a:t>Example of signal with two frequencies and the </a:t>
+              <a:t>Example of time series with two frequencies and the </a:t>
             </a:r>
             <a:r>
               <a:rPr lang="en-US" b="1" dirty="0">
